--- a/protected-downloads/praesentation/TL02.pptx
+++ b/protected-downloads/praesentation/TL02.pptx
@@ -667,6 +667,11 @@
         <p:txBody>
           <a:bodyPr/>
           <a:lstStyle/>
+          <a:p>
+            <a:r>
+              <a:t>Grenz-Faustformel (max. 2 Sätze, dann direkt zum Gesprächseinstieg): D2 zeigt sich in der Frageform ('Schaffe ich das?' – Zweifel am Können), Wertekonflikt in der Aussageform ('Das halte ich für falsch' – Ablehnung der Sache). Vertiefung nur auf Nachfrage.</a:t>
+            </a:r>
+          </a:p>
           <a:p>
             <a:r>
               <a:t>Trainer-Eröffnung von Marlies wörtlich vorlesen: 'Sigrid, ich schaue mir die Systemdaten der letzten zwei Wochen an…' – demonstriert den Tonraum zwischen Anklage und Entschuldigung.</a:t>
@@ -14098,7 +14103,7 @@
                 </a:solidFill>
                 <a:latin typeface="Arial"/>
               </a:rPr>
-              <a:t>  ·  Einzelarbeit, still (5–7 Min.): Selbstreflexionsfragen aus Sec 4 (Leitfragen 1–3). Kein Sammeln im Plenum – Ergebnis bleibt persönlich. Überleitung: „Was Sie jetzt aufgeschrieben haben, bringen Sie gleich in die Fallarbeit mit."</a:t>
+              <a:t>  ·  Einzelarbeit, still (5–7 Min.): Selbstreflexionsfragen aus Sec 4 (Leitfragen 1–3). Kein Sammeln im Plenum – Ergebnis bleibt persönlich. Überleitung: „Bitte lassen Sie das Formular offen – Sie brauchen Frage 4 gleich für die Fallberatung. Was Sie jetzt aufgeschrieben haben, bringen Sie gleich in die Fallarbeit mit."</a:t>
             </a:r>
           </a:p>
           <a:p>
